--- a/Slides/6_Cloud_Platforms_Modern_Data_Stack.pptx
+++ b/Slides/6_Cloud_Platforms_Modern_Data_Stack.pptx
@@ -5,7 +5,7 @@
     <p:sldMasterId id="2147483648" r:id="rId1"/>
   </p:sldMasterIdLst>
   <p:notesMasterIdLst>
-    <p:notesMasterId r:id="rId25"/>
+    <p:notesMasterId r:id="rId23"/>
   </p:notesMasterIdLst>
   <p:sldIdLst>
     <p:sldId id="256" r:id="rId2"/>
@@ -29,8 +29,6 @@
     <p:sldId id="275" r:id="rId20"/>
     <p:sldId id="276" r:id="rId21"/>
     <p:sldId id="277" r:id="rId22"/>
-    <p:sldId id="278" r:id="rId23"/>
-    <p:sldId id="279" r:id="rId24"/>
   </p:sldIdLst>
   <p:sldSz cx="9144000" cy="5143500" type="screen16x9"/>
   <p:notesSz cx="5143500" cy="9144000"/>
@@ -1417,174 +1415,6 @@
             <a:fld id="{F7021451-1387-4CA6-816F-3879F97B5CBC}" type="slidenum">
               <a:rPr lang="en-US"/>
               <a:t>21</a:t>
-            </a:fld>
-            <a:endParaRPr lang="en-US"/>
-          </a:p>
-        </p:txBody>
-      </p:sp>
-    </p:spTree>
-    <p:extLst>
-      <p:ext uri="{BB962C8B-B14F-4D97-AF65-F5344CB8AC3E}">
-        <p14:creationId xmlns:p14="http://schemas.microsoft.com/office/powerpoint/2010/main" val="1024086991"/>
-      </p:ext>
-    </p:extLst>
-  </p:cSld>
-  <p:clrMapOvr>
-    <a:masterClrMapping/>
-  </p:clrMapOvr>
-</p:notes>
-</file>
-
-<file path=ppt/notesSlides/notesSlide22.xml><?xml version="1.0" encoding="utf-8"?>
-<p:notes xmlns:a="http://schemas.openxmlformats.org/drawingml/2006/main" xmlns:r="http://schemas.openxmlformats.org/officeDocument/2006/relationships" xmlns:p="http://schemas.openxmlformats.org/presentationml/2006/main">
-  <p:cSld>
-    <p:spTree>
-      <p:nvGrpSpPr>
-        <p:cNvPr id="1" name=""/>
-        <p:cNvGrpSpPr/>
-        <p:nvPr/>
-      </p:nvGrpSpPr>
-      <p:grpSpPr>
-        <a:xfrm>
-          <a:off x="0" y="0"/>
-          <a:ext cx="0" cy="0"/>
-          <a:chOff x="0" y="0"/>
-          <a:chExt cx="0" cy="0"/>
-        </a:xfrm>
-      </p:grpSpPr>
-      <p:sp>
-        <p:nvSpPr>
-          <p:cNvPr id="2" name="Slide Image Placeholder 1"/>
-          <p:cNvSpPr>
-            <a:spLocks noGrp="1" noRot="1" noChangeAspect="1"/>
-          </p:cNvSpPr>
-          <p:nvPr>
-            <p:ph type="sldImg"/>
-          </p:nvPr>
-        </p:nvSpPr>
-        <p:spPr/>
-      </p:sp>
-      <p:sp>
-        <p:nvSpPr>
-          <p:cNvPr id="3" name="Notes Placeholder 2"/>
-          <p:cNvSpPr>
-            <a:spLocks noGrp="1"/>
-          </p:cNvSpPr>
-          <p:nvPr>
-            <p:ph type="body" idx="1"/>
-          </p:nvPr>
-        </p:nvSpPr>
-        <p:spPr/>
-        <p:txBody>
-          <a:bodyPr/>
-          <a:lstStyle/>
-          <a:p>
-            <a:endParaRPr lang="en-US" dirty="0"/>
-          </a:p>
-        </p:txBody>
-      </p:sp>
-      <p:sp>
-        <p:nvSpPr>
-          <p:cNvPr id="4" name="Slide Number Placeholder 3"/>
-          <p:cNvSpPr>
-            <a:spLocks noGrp="1"/>
-          </p:cNvSpPr>
-          <p:nvPr>
-            <p:ph type="sldNum" sz="quarter" idx="10"/>
-          </p:nvPr>
-        </p:nvSpPr>
-        <p:spPr/>
-        <p:txBody>
-          <a:bodyPr/>
-          <a:lstStyle/>
-          <a:p>
-            <a:fld id="{F7021451-1387-4CA6-816F-3879F97B5CBC}" type="slidenum">
-              <a:rPr lang="en-US"/>
-              <a:t>22</a:t>
-            </a:fld>
-            <a:endParaRPr lang="en-US"/>
-          </a:p>
-        </p:txBody>
-      </p:sp>
-    </p:spTree>
-    <p:extLst>
-      <p:ext uri="{BB962C8B-B14F-4D97-AF65-F5344CB8AC3E}">
-        <p14:creationId xmlns:p14="http://schemas.microsoft.com/office/powerpoint/2010/main" val="1024086991"/>
-      </p:ext>
-    </p:extLst>
-  </p:cSld>
-  <p:clrMapOvr>
-    <a:masterClrMapping/>
-  </p:clrMapOvr>
-</p:notes>
-</file>
-
-<file path=ppt/notesSlides/notesSlide23.xml><?xml version="1.0" encoding="utf-8"?>
-<p:notes xmlns:a="http://schemas.openxmlformats.org/drawingml/2006/main" xmlns:r="http://schemas.openxmlformats.org/officeDocument/2006/relationships" xmlns:p="http://schemas.openxmlformats.org/presentationml/2006/main">
-  <p:cSld>
-    <p:spTree>
-      <p:nvGrpSpPr>
-        <p:cNvPr id="1" name=""/>
-        <p:cNvGrpSpPr/>
-        <p:nvPr/>
-      </p:nvGrpSpPr>
-      <p:grpSpPr>
-        <a:xfrm>
-          <a:off x="0" y="0"/>
-          <a:ext cx="0" cy="0"/>
-          <a:chOff x="0" y="0"/>
-          <a:chExt cx="0" cy="0"/>
-        </a:xfrm>
-      </p:grpSpPr>
-      <p:sp>
-        <p:nvSpPr>
-          <p:cNvPr id="2" name="Slide Image Placeholder 1"/>
-          <p:cNvSpPr>
-            <a:spLocks noGrp="1" noRot="1" noChangeAspect="1"/>
-          </p:cNvSpPr>
-          <p:nvPr>
-            <p:ph type="sldImg"/>
-          </p:nvPr>
-        </p:nvSpPr>
-        <p:spPr/>
-      </p:sp>
-      <p:sp>
-        <p:nvSpPr>
-          <p:cNvPr id="3" name="Notes Placeholder 2"/>
-          <p:cNvSpPr>
-            <a:spLocks noGrp="1"/>
-          </p:cNvSpPr>
-          <p:nvPr>
-            <p:ph type="body" idx="1"/>
-          </p:nvPr>
-        </p:nvSpPr>
-        <p:spPr/>
-        <p:txBody>
-          <a:bodyPr/>
-          <a:lstStyle/>
-          <a:p>
-            <a:endParaRPr lang="en-US" dirty="0"/>
-          </a:p>
-        </p:txBody>
-      </p:sp>
-      <p:sp>
-        <p:nvSpPr>
-          <p:cNvPr id="4" name="Slide Number Placeholder 3"/>
-          <p:cNvSpPr>
-            <a:spLocks noGrp="1"/>
-          </p:cNvSpPr>
-          <p:nvPr>
-            <p:ph type="sldNum" sz="quarter" idx="10"/>
-          </p:nvPr>
-        </p:nvSpPr>
-        <p:spPr/>
-        <p:txBody>
-          <a:bodyPr/>
-          <a:lstStyle/>
-          <a:p>
-            <a:fld id="{F7021451-1387-4CA6-816F-3879F97B5CBC}" type="slidenum">
-              <a:rPr lang="en-US"/>
-              <a:t>23</a:t>
             </a:fld>
             <a:endParaRPr lang="en-US"/>
           </a:p>
@@ -10337,111 +10167,6 @@
           </a:p>
         </p:txBody>
       </p:sp>
-      <p:sp>
-        <p:nvSpPr>
-          <p:cNvPr id="25" name="Shape 23"/>
-          <p:cNvSpPr/>
-          <p:nvPr/>
-        </p:nvSpPr>
-        <p:spPr>
-          <a:xfrm>
-            <a:off x="457200" y="4023360"/>
-            <a:ext cx="8229600" cy="640080"/>
-          </a:xfrm>
-          <a:prstGeom prst="rect">
-            <a:avLst/>
-          </a:prstGeom>
-          <a:solidFill>
-            <a:srgbClr val="E8F4F8"/>
-          </a:solidFill>
-          <a:ln/>
-        </p:spPr>
-        <p:txBody>
-          <a:bodyPr/>
-          <a:lstStyle/>
-          <a:p>
-            <a:endParaRPr lang="en-US"/>
-          </a:p>
-        </p:txBody>
-      </p:sp>
-      <p:sp>
-        <p:nvSpPr>
-          <p:cNvPr id="26" name="Text 24"/>
-          <p:cNvSpPr/>
-          <p:nvPr/>
-        </p:nvSpPr>
-        <p:spPr>
-          <a:xfrm>
-            <a:off x="640080" y="4069080"/>
-            <a:ext cx="7863840" cy="274320"/>
-          </a:xfrm>
-          <a:prstGeom prst="rect">
-            <a:avLst/>
-          </a:prstGeom>
-          <a:noFill/>
-          <a:ln/>
-        </p:spPr>
-        <p:txBody>
-          <a:bodyPr wrap="square" rtlCol="0" anchor="ctr"/>
-          <a:lstStyle/>
-          <a:p>
-            <a:pPr marL="0" indent="0">
-              <a:buNone/>
-            </a:pPr>
-            <a:r>
-              <a:rPr lang="en-US" sz="1100" b="1" dirty="0">
-                <a:solidFill>
-                  <a:srgbClr val="065A82"/>
-                </a:solidFill>
-                <a:latin typeface="Calibri" pitchFamily="34" charset="0"/>
-                <a:ea typeface="Calibri" pitchFamily="34" charset="-122"/>
-                <a:cs typeface="Calibri" pitchFamily="34" charset="-120"/>
-              </a:rPr>
-              <a:t>Nepal Context: Nepal Rastra Bank has data localization rules for financial data.</a:t>
-            </a:r>
-            <a:endParaRPr lang="en-US" sz="1100" dirty="0"/>
-          </a:p>
-        </p:txBody>
-      </p:sp>
-      <p:sp>
-        <p:nvSpPr>
-          <p:cNvPr id="27" name="Text 25"/>
-          <p:cNvSpPr/>
-          <p:nvPr/>
-        </p:nvSpPr>
-        <p:spPr>
-          <a:xfrm>
-            <a:off x="640080" y="4343400"/>
-            <a:ext cx="7863840" cy="274320"/>
-          </a:xfrm>
-          <a:prstGeom prst="rect">
-            <a:avLst/>
-          </a:prstGeom>
-          <a:noFill/>
-          <a:ln/>
-        </p:spPr>
-        <p:txBody>
-          <a:bodyPr wrap="square" rtlCol="0" anchor="ctr"/>
-          <a:lstStyle/>
-          <a:p>
-            <a:pPr marL="0" indent="0">
-              <a:buNone/>
-            </a:pPr>
-            <a:r>
-              <a:rPr lang="en-US" sz="1000" dirty="0">
-                <a:solidFill>
-                  <a:srgbClr val="2D3748"/>
-                </a:solidFill>
-                <a:latin typeface="Calibri" pitchFamily="34" charset="0"/>
-                <a:ea typeface="Calibri" pitchFamily="34" charset="-122"/>
-                <a:cs typeface="Calibri" pitchFamily="34" charset="-120"/>
-              </a:rPr>
-              <a:t>Many cloud providers now have data centers in nearby regions (Mumbai, Singapore).</a:t>
-            </a:r>
-            <a:endParaRPr lang="en-US" sz="1000" dirty="0"/>
-          </a:p>
-        </p:txBody>
-      </p:sp>
     </p:spTree>
   </p:cSld>
   <p:clrMapOvr>
@@ -15142,13 +14867,13 @@
       </p:sp>
       <p:sp>
         <p:nvSpPr>
-          <p:cNvPr id="4" name="Shape 2"/>
-          <p:cNvSpPr/>
-          <p:nvPr/>
-        </p:nvSpPr>
-        <p:spPr>
-          <a:xfrm>
-            <a:off x="457200" y="1280160"/>
+          <p:cNvPr id="9" name="Shape 7"/>
+          <p:cNvSpPr/>
+          <p:nvPr/>
+        </p:nvSpPr>
+        <p:spPr>
+          <a:xfrm>
+            <a:off x="457200" y="1316736"/>
             <a:ext cx="8229600" cy="777240"/>
           </a:xfrm>
           <a:prstGeom prst="rect">
@@ -15169,13 +14894,13 @@
       </p:sp>
       <p:sp>
         <p:nvSpPr>
-          <p:cNvPr id="5" name="Text 3"/>
-          <p:cNvSpPr/>
-          <p:nvPr/>
-        </p:nvSpPr>
-        <p:spPr>
-          <a:xfrm>
-            <a:off x="640080" y="1371600"/>
+          <p:cNvPr id="10" name="Text 8"/>
+          <p:cNvSpPr/>
+          <p:nvPr/>
+        </p:nvSpPr>
+        <p:spPr>
+          <a:xfrm>
+            <a:off x="457200" y="1319142"/>
             <a:ext cx="3657600" cy="320040"/>
           </a:xfrm>
           <a:prstGeom prst="rect">
@@ -15200,7 +14925,7 @@
                 <a:ea typeface="Calibri" pitchFamily="34" charset="-122"/>
                 <a:cs typeface="Calibri" pitchFamily="34" charset="-120"/>
               </a:rPr>
-              <a:t>Azure SQL Database</a:t>
+              <a:t>Google BigQuery</a:t>
             </a:r>
             <a:endParaRPr lang="en-US" sz="1400" dirty="0"/>
           </a:p>
@@ -15208,13 +14933,13 @@
       </p:sp>
       <p:sp>
         <p:nvSpPr>
-          <p:cNvPr id="6" name="Text 4"/>
-          <p:cNvSpPr/>
-          <p:nvPr/>
-        </p:nvSpPr>
-        <p:spPr>
-          <a:xfrm>
-            <a:off x="640080" y="1664208"/>
+          <p:cNvPr id="11" name="Text 9"/>
+          <p:cNvSpPr/>
+          <p:nvPr/>
+        </p:nvSpPr>
+        <p:spPr>
+          <a:xfrm>
+            <a:off x="457200" y="1577340"/>
             <a:ext cx="4572000" cy="320040"/>
           </a:xfrm>
           <a:prstGeom prst="rect">
@@ -15239,7 +14964,7 @@
                 <a:ea typeface="Calibri" pitchFamily="34" charset="-122"/>
                 <a:cs typeface="Calibri" pitchFamily="34" charset="-120"/>
               </a:rPr>
-              <a:t>Free tier: 100K vCore-seconds/month</a:t>
+              <a:t>Free tier: 1 TB queries, 10 GB storage</a:t>
             </a:r>
             <a:endParaRPr lang="en-US" sz="1100" dirty="0"/>
           </a:p>
@@ -15247,13 +14972,13 @@
       </p:sp>
       <p:sp>
         <p:nvSpPr>
-          <p:cNvPr id="7" name="Text 5"/>
-          <p:cNvSpPr/>
-          <p:nvPr/>
-        </p:nvSpPr>
-        <p:spPr>
-          <a:xfrm>
-            <a:off x="5029200" y="1371600"/>
+          <p:cNvPr id="12" name="Text 10"/>
+          <p:cNvSpPr/>
+          <p:nvPr/>
+        </p:nvSpPr>
+        <p:spPr>
+          <a:xfrm>
+            <a:off x="4975058" y="1325880"/>
             <a:ext cx="1371600" cy="320040"/>
           </a:xfrm>
           <a:prstGeom prst="rect">
@@ -15286,13 +15011,13 @@
       </p:sp>
       <p:sp>
         <p:nvSpPr>
-          <p:cNvPr id="8" name="Text 6"/>
-          <p:cNvSpPr/>
-          <p:nvPr/>
-        </p:nvSpPr>
-        <p:spPr>
-          <a:xfrm>
-            <a:off x="6400800" y="1371600"/>
+          <p:cNvPr id="13" name="Text 11"/>
+          <p:cNvSpPr/>
+          <p:nvPr/>
+        </p:nvSpPr>
+        <p:spPr>
+          <a:xfrm>
+            <a:off x="6465169" y="1319142"/>
             <a:ext cx="2103120" cy="320040"/>
           </a:xfrm>
           <a:prstGeom prst="rect">
@@ -15317,7 +15042,7 @@
                 <a:ea typeface="Calibri" pitchFamily="34" charset="-122"/>
                 <a:cs typeface="Calibri" pitchFamily="34" charset="-120"/>
               </a:rPr>
-              <a:t>portal.azure.com</a:t>
+              <a:t>console.cloud.google.com</a:t>
             </a:r>
             <a:endParaRPr lang="en-US" sz="1000" dirty="0"/>
           </a:p>
@@ -15325,13 +15050,13 @@
       </p:sp>
       <p:sp>
         <p:nvSpPr>
-          <p:cNvPr id="9" name="Shape 7"/>
-          <p:cNvSpPr/>
-          <p:nvPr/>
-        </p:nvSpPr>
-        <p:spPr>
-          <a:xfrm>
-            <a:off x="457200" y="2148840"/>
+          <p:cNvPr id="14" name="Shape 12"/>
+          <p:cNvSpPr/>
+          <p:nvPr/>
+        </p:nvSpPr>
+        <p:spPr>
+          <a:xfrm>
+            <a:off x="457200" y="2162556"/>
             <a:ext cx="8229600" cy="777240"/>
           </a:xfrm>
           <a:prstGeom prst="rect">
@@ -15352,13 +15077,13 @@
       </p:sp>
       <p:sp>
         <p:nvSpPr>
-          <p:cNvPr id="10" name="Text 8"/>
-          <p:cNvSpPr/>
-          <p:nvPr/>
-        </p:nvSpPr>
-        <p:spPr>
-          <a:xfrm>
-            <a:off x="640080" y="2240280"/>
+          <p:cNvPr id="15" name="Text 13"/>
+          <p:cNvSpPr/>
+          <p:nvPr/>
+        </p:nvSpPr>
+        <p:spPr>
+          <a:xfrm>
+            <a:off x="519765" y="2121408"/>
             <a:ext cx="3657600" cy="320040"/>
           </a:xfrm>
           <a:prstGeom prst="rect">
@@ -15383,7 +15108,7 @@
                 <a:ea typeface="Calibri" pitchFamily="34" charset="-122"/>
                 <a:cs typeface="Calibri" pitchFamily="34" charset="-120"/>
               </a:rPr>
-              <a:t>Google BigQuery</a:t>
+              <a:t>AWS Free Tier</a:t>
             </a:r>
             <a:endParaRPr lang="en-US" sz="1400" dirty="0"/>
           </a:p>
@@ -15391,13 +15116,13 @@
       </p:sp>
       <p:sp>
         <p:nvSpPr>
-          <p:cNvPr id="11" name="Text 9"/>
-          <p:cNvSpPr/>
-          <p:nvPr/>
-        </p:nvSpPr>
-        <p:spPr>
-          <a:xfrm>
-            <a:off x="640080" y="2532888"/>
+          <p:cNvPr id="16" name="Text 14"/>
+          <p:cNvSpPr/>
+          <p:nvPr/>
+        </p:nvSpPr>
+        <p:spPr>
+          <a:xfrm>
+            <a:off x="519765" y="2391156"/>
             <a:ext cx="4572000" cy="320040"/>
           </a:xfrm>
           <a:prstGeom prst="rect">
@@ -15422,7 +15147,7 @@
                 <a:ea typeface="Calibri" pitchFamily="34" charset="-122"/>
                 <a:cs typeface="Calibri" pitchFamily="34" charset="-120"/>
               </a:rPr>
-              <a:t>Free tier: 1 TB queries, 10 GB storage</a:t>
+              <a:t>Free tier: 750 hrs RDS, 5 GB S3</a:t>
             </a:r>
             <a:endParaRPr lang="en-US" sz="1100" dirty="0"/>
           </a:p>
@@ -15430,13 +15155,13 @@
       </p:sp>
       <p:sp>
         <p:nvSpPr>
-          <p:cNvPr id="12" name="Text 10"/>
-          <p:cNvSpPr/>
-          <p:nvPr/>
-        </p:nvSpPr>
-        <p:spPr>
-          <a:xfrm>
-            <a:off x="5029200" y="2240280"/>
+          <p:cNvPr id="17" name="Text 15"/>
+          <p:cNvSpPr/>
+          <p:nvPr/>
+        </p:nvSpPr>
+        <p:spPr>
+          <a:xfrm>
+            <a:off x="5029200" y="2190710"/>
             <a:ext cx="1371600" cy="320040"/>
           </a:xfrm>
           <a:prstGeom prst="rect">
@@ -15461,7 +15186,7 @@
                 <a:ea typeface="Calibri" pitchFamily="34" charset="-122"/>
                 <a:cs typeface="Calibri" pitchFamily="34" charset="-120"/>
               </a:rPr>
-              <a:t>Always free</a:t>
+              <a:t>12 months</a:t>
             </a:r>
             <a:endParaRPr lang="en-US" sz="1100" dirty="0"/>
           </a:p>
@@ -15469,13 +15194,13 @@
       </p:sp>
       <p:sp>
         <p:nvSpPr>
-          <p:cNvPr id="13" name="Text 11"/>
-          <p:cNvSpPr/>
-          <p:nvPr/>
-        </p:nvSpPr>
-        <p:spPr>
-          <a:xfrm>
-            <a:off x="6400800" y="2240280"/>
+          <p:cNvPr id="18" name="Text 16"/>
+          <p:cNvSpPr/>
+          <p:nvPr/>
+        </p:nvSpPr>
+        <p:spPr>
+          <a:xfrm>
+            <a:off x="6583680" y="2190710"/>
             <a:ext cx="2103120" cy="320040"/>
           </a:xfrm>
           <a:prstGeom prst="rect">
@@ -15500,7 +15225,7 @@
                 <a:ea typeface="Calibri" pitchFamily="34" charset="-122"/>
                 <a:cs typeface="Calibri" pitchFamily="34" charset="-120"/>
               </a:rPr>
-              <a:t>console.cloud.google.com</a:t>
+              <a:t>aws.amazon.com/free</a:t>
             </a:r>
             <a:endParaRPr lang="en-US" sz="1000" dirty="0"/>
           </a:p>
@@ -15508,13 +15233,13 @@
       </p:sp>
       <p:sp>
         <p:nvSpPr>
-          <p:cNvPr id="14" name="Shape 12"/>
-          <p:cNvSpPr/>
-          <p:nvPr/>
-        </p:nvSpPr>
-        <p:spPr>
-          <a:xfrm>
-            <a:off x="457200" y="3017520"/>
+          <p:cNvPr id="19" name="Shape 17"/>
+          <p:cNvSpPr/>
+          <p:nvPr/>
+        </p:nvSpPr>
+        <p:spPr>
+          <a:xfrm>
+            <a:off x="457200" y="3054096"/>
             <a:ext cx="8229600" cy="777240"/>
           </a:xfrm>
           <a:prstGeom prst="rect">
@@ -15535,13 +15260,13 @@
       </p:sp>
       <p:sp>
         <p:nvSpPr>
-          <p:cNvPr id="15" name="Text 13"/>
-          <p:cNvSpPr/>
-          <p:nvPr/>
-        </p:nvSpPr>
-        <p:spPr>
-          <a:xfrm>
-            <a:off x="640080" y="3108960"/>
+          <p:cNvPr id="20" name="Text 18"/>
+          <p:cNvSpPr/>
+          <p:nvPr/>
+        </p:nvSpPr>
+        <p:spPr>
+          <a:xfrm>
+            <a:off x="573906" y="3072384"/>
             <a:ext cx="3657600" cy="320040"/>
           </a:xfrm>
           <a:prstGeom prst="rect">
@@ -15566,7 +15291,7 @@
                 <a:ea typeface="Calibri" pitchFamily="34" charset="-122"/>
                 <a:cs typeface="Calibri" pitchFamily="34" charset="-120"/>
               </a:rPr>
-              <a:t>AWS Free Tier</a:t>
+              <a:t>Snowflake Trial</a:t>
             </a:r>
             <a:endParaRPr lang="en-US" sz="1400" dirty="0"/>
           </a:p>
@@ -15574,13 +15299,13 @@
       </p:sp>
       <p:sp>
         <p:nvSpPr>
-          <p:cNvPr id="16" name="Text 14"/>
-          <p:cNvSpPr/>
-          <p:nvPr/>
-        </p:nvSpPr>
-        <p:spPr>
-          <a:xfrm>
-            <a:off x="640080" y="3401568"/>
+          <p:cNvPr id="21" name="Text 19"/>
+          <p:cNvSpPr/>
+          <p:nvPr/>
+        </p:nvSpPr>
+        <p:spPr>
+          <a:xfrm>
+            <a:off x="573906" y="3305556"/>
             <a:ext cx="4572000" cy="320040"/>
           </a:xfrm>
           <a:prstGeom prst="rect">
@@ -15605,7 +15330,7 @@
                 <a:ea typeface="Calibri" pitchFamily="34" charset="-122"/>
                 <a:cs typeface="Calibri" pitchFamily="34" charset="-120"/>
               </a:rPr>
-              <a:t>Free tier: 750 hrs RDS, 5 GB S3</a:t>
+              <a:t>$400 credits</a:t>
             </a:r>
             <a:endParaRPr lang="en-US" sz="1100" dirty="0"/>
           </a:p>
@@ -15613,13 +15338,13 @@
       </p:sp>
       <p:sp>
         <p:nvSpPr>
-          <p:cNvPr id="17" name="Text 15"/>
-          <p:cNvSpPr/>
-          <p:nvPr/>
-        </p:nvSpPr>
-        <p:spPr>
-          <a:xfrm>
-            <a:off x="5029200" y="3108960"/>
+          <p:cNvPr id="22" name="Text 20"/>
+          <p:cNvSpPr/>
+          <p:nvPr/>
+        </p:nvSpPr>
+        <p:spPr>
+          <a:xfrm>
+            <a:off x="4975058" y="3099816"/>
             <a:ext cx="1371600" cy="320040"/>
           </a:xfrm>
           <a:prstGeom prst="rect">
@@ -15644,7 +15369,7 @@
                 <a:ea typeface="Calibri" pitchFamily="34" charset="-122"/>
                 <a:cs typeface="Calibri" pitchFamily="34" charset="-120"/>
               </a:rPr>
-              <a:t>12 months</a:t>
+              <a:t>30 days</a:t>
             </a:r>
             <a:endParaRPr lang="en-US" sz="1100" dirty="0"/>
           </a:p>
@@ -15652,13 +15377,13 @@
       </p:sp>
       <p:sp>
         <p:nvSpPr>
-          <p:cNvPr id="18" name="Text 16"/>
-          <p:cNvSpPr/>
-          <p:nvPr/>
-        </p:nvSpPr>
-        <p:spPr>
-          <a:xfrm>
-            <a:off x="6400800" y="3108960"/>
+          <p:cNvPr id="23" name="Text 21"/>
+          <p:cNvSpPr/>
+          <p:nvPr/>
+        </p:nvSpPr>
+        <p:spPr>
+          <a:xfrm>
+            <a:off x="6529538" y="3145536"/>
             <a:ext cx="2103120" cy="320040"/>
           </a:xfrm>
           <a:prstGeom prst="rect">
@@ -15683,258 +15408,9 @@
                 <a:ea typeface="Calibri" pitchFamily="34" charset="-122"/>
                 <a:cs typeface="Calibri" pitchFamily="34" charset="-120"/>
               </a:rPr>
-              <a:t>aws.amazon.com/free</a:t>
+              <a:t>signup.snowflake.com</a:t>
             </a:r>
             <a:endParaRPr lang="en-US" sz="1000" dirty="0"/>
-          </a:p>
-        </p:txBody>
-      </p:sp>
-      <p:sp>
-        <p:nvSpPr>
-          <p:cNvPr id="19" name="Shape 17"/>
-          <p:cNvSpPr/>
-          <p:nvPr/>
-        </p:nvSpPr>
-        <p:spPr>
-          <a:xfrm>
-            <a:off x="457200" y="3886200"/>
-            <a:ext cx="8229600" cy="777240"/>
-          </a:xfrm>
-          <a:prstGeom prst="rect">
-            <a:avLst/>
-          </a:prstGeom>
-          <a:solidFill>
-            <a:srgbClr val="E8F4F8"/>
-          </a:solidFill>
-          <a:ln/>
-        </p:spPr>
-        <p:txBody>
-          <a:bodyPr/>
-          <a:lstStyle/>
-          <a:p>
-            <a:endParaRPr lang="en-US"/>
-          </a:p>
-        </p:txBody>
-      </p:sp>
-      <p:sp>
-        <p:nvSpPr>
-          <p:cNvPr id="20" name="Text 18"/>
-          <p:cNvSpPr/>
-          <p:nvPr/>
-        </p:nvSpPr>
-        <p:spPr>
-          <a:xfrm>
-            <a:off x="640080" y="3977640"/>
-            <a:ext cx="3657600" cy="320040"/>
-          </a:xfrm>
-          <a:prstGeom prst="rect">
-            <a:avLst/>
-          </a:prstGeom>
-          <a:noFill/>
-          <a:ln/>
-        </p:spPr>
-        <p:txBody>
-          <a:bodyPr wrap="square" rtlCol="0" anchor="ctr"/>
-          <a:lstStyle/>
-          <a:p>
-            <a:pPr marL="0" indent="0">
-              <a:buNone/>
-            </a:pPr>
-            <a:r>
-              <a:rPr lang="en-US" sz="1400" b="1" dirty="0">
-                <a:solidFill>
-                  <a:srgbClr val="065A82"/>
-                </a:solidFill>
-                <a:latin typeface="Calibri" pitchFamily="34" charset="0"/>
-                <a:ea typeface="Calibri" pitchFamily="34" charset="-122"/>
-                <a:cs typeface="Calibri" pitchFamily="34" charset="-120"/>
-              </a:rPr>
-              <a:t>Snowflake Trial</a:t>
-            </a:r>
-            <a:endParaRPr lang="en-US" sz="1400" dirty="0"/>
-          </a:p>
-        </p:txBody>
-      </p:sp>
-      <p:sp>
-        <p:nvSpPr>
-          <p:cNvPr id="21" name="Text 19"/>
-          <p:cNvSpPr/>
-          <p:nvPr/>
-        </p:nvSpPr>
-        <p:spPr>
-          <a:xfrm>
-            <a:off x="640080" y="4270248"/>
-            <a:ext cx="4572000" cy="320040"/>
-          </a:xfrm>
-          <a:prstGeom prst="rect">
-            <a:avLst/>
-          </a:prstGeom>
-          <a:noFill/>
-          <a:ln/>
-        </p:spPr>
-        <p:txBody>
-          <a:bodyPr wrap="square" rtlCol="0" anchor="ctr"/>
-          <a:lstStyle/>
-          <a:p>
-            <a:pPr marL="0" indent="0">
-              <a:buNone/>
-            </a:pPr>
-            <a:r>
-              <a:rPr lang="en-US" sz="1100" dirty="0">
-                <a:solidFill>
-                  <a:srgbClr val="2D3748"/>
-                </a:solidFill>
-                <a:latin typeface="Calibri" pitchFamily="34" charset="0"/>
-                <a:ea typeface="Calibri" pitchFamily="34" charset="-122"/>
-                <a:cs typeface="Calibri" pitchFamily="34" charset="-120"/>
-              </a:rPr>
-              <a:t>$400 credits</a:t>
-            </a:r>
-            <a:endParaRPr lang="en-US" sz="1100" dirty="0"/>
-          </a:p>
-        </p:txBody>
-      </p:sp>
-      <p:sp>
-        <p:nvSpPr>
-          <p:cNvPr id="22" name="Text 20"/>
-          <p:cNvSpPr/>
-          <p:nvPr/>
-        </p:nvSpPr>
-        <p:spPr>
-          <a:xfrm>
-            <a:off x="5029200" y="3977640"/>
-            <a:ext cx="1371600" cy="320040"/>
-          </a:xfrm>
-          <a:prstGeom prst="rect">
-            <a:avLst/>
-          </a:prstGeom>
-          <a:noFill/>
-          <a:ln/>
-        </p:spPr>
-        <p:txBody>
-          <a:bodyPr wrap="square" rtlCol="0" anchor="ctr"/>
-          <a:lstStyle/>
-          <a:p>
-            <a:pPr marL="0" indent="0">
-              <a:buNone/>
-            </a:pPr>
-            <a:r>
-              <a:rPr lang="en-US" sz="1100" b="1" dirty="0">
-                <a:solidFill>
-                  <a:srgbClr val="10B981"/>
-                </a:solidFill>
-                <a:latin typeface="Calibri" pitchFamily="34" charset="0"/>
-                <a:ea typeface="Calibri" pitchFamily="34" charset="-122"/>
-                <a:cs typeface="Calibri" pitchFamily="34" charset="-120"/>
-              </a:rPr>
-              <a:t>30 days</a:t>
-            </a:r>
-            <a:endParaRPr lang="en-US" sz="1100" dirty="0"/>
-          </a:p>
-        </p:txBody>
-      </p:sp>
-      <p:sp>
-        <p:nvSpPr>
-          <p:cNvPr id="23" name="Text 21"/>
-          <p:cNvSpPr/>
-          <p:nvPr/>
-        </p:nvSpPr>
-        <p:spPr>
-          <a:xfrm>
-            <a:off x="6400800" y="3977640"/>
-            <a:ext cx="2103120" cy="320040"/>
-          </a:xfrm>
-          <a:prstGeom prst="rect">
-            <a:avLst/>
-          </a:prstGeom>
-          <a:noFill/>
-          <a:ln/>
-        </p:spPr>
-        <p:txBody>
-          <a:bodyPr wrap="square" rtlCol="0" anchor="ctr"/>
-          <a:lstStyle/>
-          <a:p>
-            <a:pPr marL="0" indent="0">
-              <a:buNone/>
-            </a:pPr>
-            <a:r>
-              <a:rPr lang="en-US" sz="1000" dirty="0">
-                <a:solidFill>
-                  <a:srgbClr val="1C7293"/>
-                </a:solidFill>
-                <a:latin typeface="Calibri" pitchFamily="34" charset="0"/>
-                <a:ea typeface="Calibri" pitchFamily="34" charset="-122"/>
-                <a:cs typeface="Calibri" pitchFamily="34" charset="-120"/>
-              </a:rPr>
-              <a:t>signup.snowflake.com</a:t>
-            </a:r>
-            <a:endParaRPr lang="en-US" sz="1000" dirty="0"/>
-          </a:p>
-        </p:txBody>
-      </p:sp>
-      <p:sp>
-        <p:nvSpPr>
-          <p:cNvPr id="24" name="Shape 22"/>
-          <p:cNvSpPr/>
-          <p:nvPr/>
-        </p:nvSpPr>
-        <p:spPr>
-          <a:xfrm>
-            <a:off x="457200" y="4160520"/>
-            <a:ext cx="8229600" cy="548640"/>
-          </a:xfrm>
-          <a:prstGeom prst="rect">
-            <a:avLst/>
-          </a:prstGeom>
-          <a:solidFill>
-            <a:srgbClr val="065A82"/>
-          </a:solidFill>
-          <a:ln/>
-        </p:spPr>
-        <p:txBody>
-          <a:bodyPr/>
-          <a:lstStyle/>
-          <a:p>
-            <a:endParaRPr lang="en-US"/>
-          </a:p>
-        </p:txBody>
-      </p:sp>
-      <p:sp>
-        <p:nvSpPr>
-          <p:cNvPr id="25" name="Text 23"/>
-          <p:cNvSpPr/>
-          <p:nvPr/>
-        </p:nvSpPr>
-        <p:spPr>
-          <a:xfrm>
-            <a:off x="640080" y="4206240"/>
-            <a:ext cx="7863840" cy="457200"/>
-          </a:xfrm>
-          <a:prstGeom prst="rect">
-            <a:avLst/>
-          </a:prstGeom>
-          <a:noFill/>
-          <a:ln/>
-        </p:spPr>
-        <p:txBody>
-          <a:bodyPr wrap="square" rtlCol="0" anchor="ctr"/>
-          <a:lstStyle/>
-          <a:p>
-            <a:pPr marL="0" indent="0" algn="ctr">
-              <a:buNone/>
-            </a:pPr>
-            <a:r>
-              <a:rPr lang="en-US" sz="1200" b="1" dirty="0">
-                <a:solidFill>
-                  <a:srgbClr val="FFFFFF"/>
-                </a:solidFill>
-                <a:latin typeface="Calibri" pitchFamily="34" charset="0"/>
-                <a:ea typeface="Calibri" pitchFamily="34" charset="-122"/>
-                <a:cs typeface="Calibri" pitchFamily="34" charset="-120"/>
-              </a:rPr>
-              <a:t>Recommendation: Use Azure SQL Database (free) + Power BI Desktop (free)</a:t>
-            </a:r>
-            <a:endParaRPr lang="en-US" sz="1200" dirty="0"/>
           </a:p>
         </p:txBody>
       </p:sp>
@@ -16847,1027 +16323,6 @@
               <a:t>Build your visualizations!</a:t>
             </a:r>
             <a:endParaRPr lang="en-US" sz="1100" dirty="0"/>
-          </a:p>
-        </p:txBody>
-      </p:sp>
-      <p:sp>
-        <p:nvSpPr>
-          <p:cNvPr id="27" name="Shape 25"/>
-          <p:cNvSpPr/>
-          <p:nvPr/>
-        </p:nvSpPr>
-        <p:spPr>
-          <a:xfrm>
-            <a:off x="457200" y="4114800"/>
-            <a:ext cx="8229600" cy="594360"/>
-          </a:xfrm>
-          <a:prstGeom prst="rect">
-            <a:avLst/>
-          </a:prstGeom>
-          <a:solidFill>
-            <a:srgbClr val="0B3954"/>
-          </a:solidFill>
-          <a:ln/>
-        </p:spPr>
-        <p:txBody>
-          <a:bodyPr/>
-          <a:lstStyle/>
-          <a:p>
-            <a:endParaRPr lang="en-US"/>
-          </a:p>
-        </p:txBody>
-      </p:sp>
-      <p:sp>
-        <p:nvSpPr>
-          <p:cNvPr id="28" name="Text 26"/>
-          <p:cNvSpPr/>
-          <p:nvPr/>
-        </p:nvSpPr>
-        <p:spPr>
-          <a:xfrm>
-            <a:off x="640080" y="4160520"/>
-            <a:ext cx="7863840" cy="502920"/>
-          </a:xfrm>
-          <a:prstGeom prst="rect">
-            <a:avLst/>
-          </a:prstGeom>
-          <a:noFill/>
-          <a:ln/>
-        </p:spPr>
-        <p:txBody>
-          <a:bodyPr wrap="square" rtlCol="0" anchor="ctr"/>
-          <a:lstStyle/>
-          <a:p>
-            <a:pPr marL="0" indent="0">
-              <a:buNone/>
-            </a:pPr>
-            <a:r>
-              <a:rPr lang="en-US" sz="1100" dirty="0">
-                <a:solidFill>
-                  <a:srgbClr val="0EA5E9"/>
-                </a:solidFill>
-                <a:latin typeface="Consolas" pitchFamily="34" charset="0"/>
-                <a:ea typeface="Consolas" pitchFamily="34" charset="-122"/>
-                <a:cs typeface="Consolas" pitchFamily="34" charset="-120"/>
-              </a:rPr>
-              <a:t>Server: nepalmart.database.windows.net  |  Database: analytics  |  Auth: SQL Login</a:t>
-            </a:r>
-            <a:endParaRPr lang="en-US" sz="1100" dirty="0"/>
-          </a:p>
-        </p:txBody>
-      </p:sp>
-    </p:spTree>
-  </p:cSld>
-  <p:clrMapOvr>
-    <a:masterClrMapping/>
-  </p:clrMapOvr>
-</p:sld>
-</file>
-
-<file path=ppt/slides/slide22.xml><?xml version="1.0" encoding="utf-8"?>
-<p:sld xmlns:a="http://schemas.openxmlformats.org/drawingml/2006/main" xmlns:r="http://schemas.openxmlformats.org/officeDocument/2006/relationships" xmlns:p="http://schemas.openxmlformats.org/presentationml/2006/main">
-  <p:cSld name="Slide 23">
-    <p:bg>
-      <p:bgPr>
-        <a:solidFill>
-          <a:srgbClr val="FFFFFF"/>
-        </a:solidFill>
-        <a:effectLst/>
-      </p:bgPr>
-    </p:bg>
-    <p:spTree>
-      <p:nvGrpSpPr>
-        <p:cNvPr id="1" name=""/>
-        <p:cNvGrpSpPr/>
-        <p:nvPr/>
-      </p:nvGrpSpPr>
-      <p:grpSpPr>
-        <a:xfrm>
-          <a:off x="0" y="0"/>
-          <a:ext cx="0" cy="0"/>
-          <a:chOff x="0" y="0"/>
-          <a:chExt cx="0" cy="0"/>
-        </a:xfrm>
-      </p:grpSpPr>
-      <p:sp>
-        <p:nvSpPr>
-          <p:cNvPr id="2" name="Text 0"/>
-          <p:cNvSpPr/>
-          <p:nvPr/>
-        </p:nvSpPr>
-        <p:spPr>
-          <a:xfrm>
-            <a:off x="457200" y="365760"/>
-            <a:ext cx="8229600" cy="548640"/>
-          </a:xfrm>
-          <a:prstGeom prst="rect">
-            <a:avLst/>
-          </a:prstGeom>
-          <a:noFill/>
-          <a:ln/>
-        </p:spPr>
-        <p:txBody>
-          <a:bodyPr wrap="square" rtlCol="0" anchor="ctr"/>
-          <a:lstStyle/>
-          <a:p>
-            <a:pPr marL="0" indent="0">
-              <a:buNone/>
-            </a:pPr>
-            <a:r>
-              <a:rPr lang="en-US" sz="3200" b="1" dirty="0">
-                <a:solidFill>
-                  <a:srgbClr val="0B3954"/>
-                </a:solidFill>
-                <a:latin typeface="Calibri" pitchFamily="34" charset="0"/>
-                <a:ea typeface="Calibri" pitchFamily="34" charset="-122"/>
-                <a:cs typeface="Calibri" pitchFamily="34" charset="-120"/>
-              </a:rPr>
-              <a:t>Expected Output: Sales Dashboard</a:t>
-            </a:r>
-            <a:endParaRPr lang="en-US" sz="3200" dirty="0"/>
-          </a:p>
-        </p:txBody>
-      </p:sp>
-      <p:sp>
-        <p:nvSpPr>
-          <p:cNvPr id="3" name="Text 1"/>
-          <p:cNvSpPr/>
-          <p:nvPr/>
-        </p:nvSpPr>
-        <p:spPr>
-          <a:xfrm>
-            <a:off x="457200" y="868680"/>
-            <a:ext cx="8229600" cy="320040"/>
-          </a:xfrm>
-          <a:prstGeom prst="rect">
-            <a:avLst/>
-          </a:prstGeom>
-          <a:noFill/>
-          <a:ln/>
-        </p:spPr>
-        <p:txBody>
-          <a:bodyPr wrap="square" rtlCol="0" anchor="ctr"/>
-          <a:lstStyle/>
-          <a:p>
-            <a:pPr marL="0" indent="0">
-              <a:buNone/>
-            </a:pPr>
-            <a:r>
-              <a:rPr lang="en-US" sz="1300" dirty="0">
-                <a:solidFill>
-                  <a:srgbClr val="64748B"/>
-                </a:solidFill>
-                <a:latin typeface="Calibri" pitchFamily="34" charset="0"/>
-                <a:ea typeface="Calibri" pitchFamily="34" charset="-122"/>
-                <a:cs typeface="Calibri" pitchFamily="34" charset="-120"/>
-              </a:rPr>
-              <a:t>Build these visualizations from cloud-connected data</a:t>
-            </a:r>
-            <a:endParaRPr lang="en-US" sz="1300" dirty="0"/>
-          </a:p>
-        </p:txBody>
-      </p:sp>
-      <p:sp>
-        <p:nvSpPr>
-          <p:cNvPr id="4" name="Shape 2"/>
-          <p:cNvSpPr/>
-          <p:nvPr/>
-        </p:nvSpPr>
-        <p:spPr>
-          <a:xfrm>
-            <a:off x="457200" y="1280160"/>
-            <a:ext cx="2011680" cy="822960"/>
-          </a:xfrm>
-          <a:prstGeom prst="rect">
-            <a:avLst/>
-          </a:prstGeom>
-          <a:solidFill>
-            <a:srgbClr val="065A82"/>
-          </a:solidFill>
-          <a:ln/>
-        </p:spPr>
-        <p:txBody>
-          <a:bodyPr/>
-          <a:lstStyle/>
-          <a:p>
-            <a:endParaRPr lang="en-US"/>
-          </a:p>
-        </p:txBody>
-      </p:sp>
-      <p:sp>
-        <p:nvSpPr>
-          <p:cNvPr id="5" name="Text 3"/>
-          <p:cNvSpPr/>
-          <p:nvPr/>
-        </p:nvSpPr>
-        <p:spPr>
-          <a:xfrm>
-            <a:off x="457200" y="1325880"/>
-            <a:ext cx="2011680" cy="457200"/>
-          </a:xfrm>
-          <a:prstGeom prst="rect">
-            <a:avLst/>
-          </a:prstGeom>
-          <a:noFill/>
-          <a:ln/>
-        </p:spPr>
-        <p:txBody>
-          <a:bodyPr wrap="square" rtlCol="0" anchor="ctr"/>
-          <a:lstStyle/>
-          <a:p>
-            <a:pPr marL="0" indent="0" algn="ctr">
-              <a:buNone/>
-            </a:pPr>
-            <a:r>
-              <a:rPr lang="en-US" sz="1800" b="1" dirty="0">
-                <a:solidFill>
-                  <a:srgbClr val="FFFFFF"/>
-                </a:solidFill>
-                <a:latin typeface="Calibri" pitchFamily="34" charset="0"/>
-                <a:ea typeface="Calibri" pitchFamily="34" charset="-122"/>
-                <a:cs typeface="Calibri" pitchFamily="34" charset="-120"/>
-              </a:rPr>
-              <a:t>Rs 45.2L</a:t>
-            </a:r>
-            <a:endParaRPr lang="en-US" sz="1800" dirty="0"/>
-          </a:p>
-        </p:txBody>
-      </p:sp>
-      <p:sp>
-        <p:nvSpPr>
-          <p:cNvPr id="6" name="Text 4"/>
-          <p:cNvSpPr/>
-          <p:nvPr/>
-        </p:nvSpPr>
-        <p:spPr>
-          <a:xfrm>
-            <a:off x="457200" y="1783080"/>
-            <a:ext cx="2011680" cy="274320"/>
-          </a:xfrm>
-          <a:prstGeom prst="rect">
-            <a:avLst/>
-          </a:prstGeom>
-          <a:noFill/>
-          <a:ln/>
-        </p:spPr>
-        <p:txBody>
-          <a:bodyPr wrap="square" rtlCol="0" anchor="ctr"/>
-          <a:lstStyle/>
-          <a:p>
-            <a:pPr marL="0" indent="0" algn="ctr">
-              <a:buNone/>
-            </a:pPr>
-            <a:r>
-              <a:rPr lang="en-US" sz="1000" dirty="0">
-                <a:solidFill>
-                  <a:srgbClr val="FFFFFF"/>
-                </a:solidFill>
-                <a:latin typeface="Calibri" pitchFamily="34" charset="0"/>
-                <a:ea typeface="Calibri" pitchFamily="34" charset="-122"/>
-                <a:cs typeface="Calibri" pitchFamily="34" charset="-120"/>
-              </a:rPr>
-              <a:t>Total Sales</a:t>
-            </a:r>
-            <a:endParaRPr lang="en-US" sz="1000" dirty="0"/>
-          </a:p>
-        </p:txBody>
-      </p:sp>
-      <p:sp>
-        <p:nvSpPr>
-          <p:cNvPr id="7" name="Shape 5"/>
-          <p:cNvSpPr/>
-          <p:nvPr/>
-        </p:nvSpPr>
-        <p:spPr>
-          <a:xfrm>
-            <a:off x="2606040" y="1280160"/>
-            <a:ext cx="2011680" cy="822960"/>
-          </a:xfrm>
-          <a:prstGeom prst="rect">
-            <a:avLst/>
-          </a:prstGeom>
-          <a:solidFill>
-            <a:srgbClr val="065A82"/>
-          </a:solidFill>
-          <a:ln/>
-        </p:spPr>
-        <p:txBody>
-          <a:bodyPr/>
-          <a:lstStyle/>
-          <a:p>
-            <a:endParaRPr lang="en-US"/>
-          </a:p>
-        </p:txBody>
-      </p:sp>
-      <p:sp>
-        <p:nvSpPr>
-          <p:cNvPr id="8" name="Text 6"/>
-          <p:cNvSpPr/>
-          <p:nvPr/>
-        </p:nvSpPr>
-        <p:spPr>
-          <a:xfrm>
-            <a:off x="2606040" y="1325880"/>
-            <a:ext cx="2011680" cy="457200"/>
-          </a:xfrm>
-          <a:prstGeom prst="rect">
-            <a:avLst/>
-          </a:prstGeom>
-          <a:noFill/>
-          <a:ln/>
-        </p:spPr>
-        <p:txBody>
-          <a:bodyPr wrap="square" rtlCol="0" anchor="ctr"/>
-          <a:lstStyle/>
-          <a:p>
-            <a:pPr marL="0" indent="0" algn="ctr">
-              <a:buNone/>
-            </a:pPr>
-            <a:r>
-              <a:rPr lang="en-US" sz="1800" b="1" dirty="0">
-                <a:solidFill>
-                  <a:srgbClr val="FFFFFF"/>
-                </a:solidFill>
-                <a:latin typeface="Calibri" pitchFamily="34" charset="0"/>
-                <a:ea typeface="Calibri" pitchFamily="34" charset="-122"/>
-                <a:cs typeface="Calibri" pitchFamily="34" charset="-120"/>
-              </a:rPr>
-              <a:t>1,234</a:t>
-            </a:r>
-            <a:endParaRPr lang="en-US" sz="1800" dirty="0"/>
-          </a:p>
-        </p:txBody>
-      </p:sp>
-      <p:sp>
-        <p:nvSpPr>
-          <p:cNvPr id="9" name="Text 7"/>
-          <p:cNvSpPr/>
-          <p:nvPr/>
-        </p:nvSpPr>
-        <p:spPr>
-          <a:xfrm>
-            <a:off x="2606040" y="1783080"/>
-            <a:ext cx="2011680" cy="274320"/>
-          </a:xfrm>
-          <a:prstGeom prst="rect">
-            <a:avLst/>
-          </a:prstGeom>
-          <a:noFill/>
-          <a:ln/>
-        </p:spPr>
-        <p:txBody>
-          <a:bodyPr wrap="square" rtlCol="0" anchor="ctr"/>
-          <a:lstStyle/>
-          <a:p>
-            <a:pPr marL="0" indent="0" algn="ctr">
-              <a:buNone/>
-            </a:pPr>
-            <a:r>
-              <a:rPr lang="en-US" sz="1000" dirty="0">
-                <a:solidFill>
-                  <a:srgbClr val="FFFFFF"/>
-                </a:solidFill>
-                <a:latin typeface="Calibri" pitchFamily="34" charset="0"/>
-                <a:ea typeface="Calibri" pitchFamily="34" charset="-122"/>
-                <a:cs typeface="Calibri" pitchFamily="34" charset="-120"/>
-              </a:rPr>
-              <a:t>Orders</a:t>
-            </a:r>
-            <a:endParaRPr lang="en-US" sz="1000" dirty="0"/>
-          </a:p>
-        </p:txBody>
-      </p:sp>
-      <p:sp>
-        <p:nvSpPr>
-          <p:cNvPr id="10" name="Shape 8"/>
-          <p:cNvSpPr/>
-          <p:nvPr/>
-        </p:nvSpPr>
-        <p:spPr>
-          <a:xfrm>
-            <a:off x="4754880" y="1280160"/>
-            <a:ext cx="2011680" cy="822960"/>
-          </a:xfrm>
-          <a:prstGeom prst="rect">
-            <a:avLst/>
-          </a:prstGeom>
-          <a:solidFill>
-            <a:srgbClr val="065A82"/>
-          </a:solidFill>
-          <a:ln/>
-        </p:spPr>
-        <p:txBody>
-          <a:bodyPr/>
-          <a:lstStyle/>
-          <a:p>
-            <a:endParaRPr lang="en-US"/>
-          </a:p>
-        </p:txBody>
-      </p:sp>
-      <p:sp>
-        <p:nvSpPr>
-          <p:cNvPr id="11" name="Text 9"/>
-          <p:cNvSpPr/>
-          <p:nvPr/>
-        </p:nvSpPr>
-        <p:spPr>
-          <a:xfrm>
-            <a:off x="4754880" y="1325880"/>
-            <a:ext cx="2011680" cy="457200"/>
-          </a:xfrm>
-          <a:prstGeom prst="rect">
-            <a:avLst/>
-          </a:prstGeom>
-          <a:noFill/>
-          <a:ln/>
-        </p:spPr>
-        <p:txBody>
-          <a:bodyPr wrap="square" rtlCol="0" anchor="ctr"/>
-          <a:lstStyle/>
-          <a:p>
-            <a:pPr marL="0" indent="0" algn="ctr">
-              <a:buNone/>
-            </a:pPr>
-            <a:r>
-              <a:rPr lang="en-US" sz="1800" b="1" dirty="0">
-                <a:solidFill>
-                  <a:srgbClr val="FFFFFF"/>
-                </a:solidFill>
-                <a:latin typeface="Calibri" pitchFamily="34" charset="0"/>
-                <a:ea typeface="Calibri" pitchFamily="34" charset="-122"/>
-                <a:cs typeface="Calibri" pitchFamily="34" charset="-120"/>
-              </a:rPr>
-              <a:t>Rs 3,665</a:t>
-            </a:r>
-            <a:endParaRPr lang="en-US" sz="1800" dirty="0"/>
-          </a:p>
-        </p:txBody>
-      </p:sp>
-      <p:sp>
-        <p:nvSpPr>
-          <p:cNvPr id="12" name="Text 10"/>
-          <p:cNvSpPr/>
-          <p:nvPr/>
-        </p:nvSpPr>
-        <p:spPr>
-          <a:xfrm>
-            <a:off x="4754880" y="1783080"/>
-            <a:ext cx="2011680" cy="274320"/>
-          </a:xfrm>
-          <a:prstGeom prst="rect">
-            <a:avLst/>
-          </a:prstGeom>
-          <a:noFill/>
-          <a:ln/>
-        </p:spPr>
-        <p:txBody>
-          <a:bodyPr wrap="square" rtlCol="0" anchor="ctr"/>
-          <a:lstStyle/>
-          <a:p>
-            <a:pPr marL="0" indent="0" algn="ctr">
-              <a:buNone/>
-            </a:pPr>
-            <a:r>
-              <a:rPr lang="en-US" sz="1000" dirty="0">
-                <a:solidFill>
-                  <a:srgbClr val="FFFFFF"/>
-                </a:solidFill>
-                <a:latin typeface="Calibri" pitchFamily="34" charset="0"/>
-                <a:ea typeface="Calibri" pitchFamily="34" charset="-122"/>
-                <a:cs typeface="Calibri" pitchFamily="34" charset="-120"/>
-              </a:rPr>
-              <a:t>Avg Order</a:t>
-            </a:r>
-            <a:endParaRPr lang="en-US" sz="1000" dirty="0"/>
-          </a:p>
-        </p:txBody>
-      </p:sp>
-      <p:sp>
-        <p:nvSpPr>
-          <p:cNvPr id="13" name="Shape 11"/>
-          <p:cNvSpPr/>
-          <p:nvPr/>
-        </p:nvSpPr>
-        <p:spPr>
-          <a:xfrm>
-            <a:off x="6903720" y="1280160"/>
-            <a:ext cx="2011680" cy="822960"/>
-          </a:xfrm>
-          <a:prstGeom prst="rect">
-            <a:avLst/>
-          </a:prstGeom>
-          <a:solidFill>
-            <a:srgbClr val="065A82"/>
-          </a:solidFill>
-          <a:ln/>
-        </p:spPr>
-        <p:txBody>
-          <a:bodyPr/>
-          <a:lstStyle/>
-          <a:p>
-            <a:endParaRPr lang="en-US"/>
-          </a:p>
-        </p:txBody>
-      </p:sp>
-      <p:sp>
-        <p:nvSpPr>
-          <p:cNvPr id="14" name="Text 12"/>
-          <p:cNvSpPr/>
-          <p:nvPr/>
-        </p:nvSpPr>
-        <p:spPr>
-          <a:xfrm>
-            <a:off x="6903720" y="1325880"/>
-            <a:ext cx="2011680" cy="457200"/>
-          </a:xfrm>
-          <a:prstGeom prst="rect">
-            <a:avLst/>
-          </a:prstGeom>
-          <a:noFill/>
-          <a:ln/>
-        </p:spPr>
-        <p:txBody>
-          <a:bodyPr wrap="square" rtlCol="0" anchor="ctr"/>
-          <a:lstStyle/>
-          <a:p>
-            <a:pPr marL="0" indent="0" algn="ctr">
-              <a:buNone/>
-            </a:pPr>
-            <a:r>
-              <a:rPr lang="en-US" sz="1800" b="1" dirty="0">
-                <a:solidFill>
-                  <a:srgbClr val="FFFFFF"/>
-                </a:solidFill>
-                <a:latin typeface="Calibri" pitchFamily="34" charset="0"/>
-                <a:ea typeface="Calibri" pitchFamily="34" charset="-122"/>
-                <a:cs typeface="Calibri" pitchFamily="34" charset="-120"/>
-              </a:rPr>
-              <a:t>892</a:t>
-            </a:r>
-            <a:endParaRPr lang="en-US" sz="1800" dirty="0"/>
-          </a:p>
-        </p:txBody>
-      </p:sp>
-      <p:sp>
-        <p:nvSpPr>
-          <p:cNvPr id="15" name="Text 13"/>
-          <p:cNvSpPr/>
-          <p:nvPr/>
-        </p:nvSpPr>
-        <p:spPr>
-          <a:xfrm>
-            <a:off x="6903720" y="1783080"/>
-            <a:ext cx="2011680" cy="274320"/>
-          </a:xfrm>
-          <a:prstGeom prst="rect">
-            <a:avLst/>
-          </a:prstGeom>
-          <a:noFill/>
-          <a:ln/>
-        </p:spPr>
-        <p:txBody>
-          <a:bodyPr wrap="square" rtlCol="0" anchor="ctr"/>
-          <a:lstStyle/>
-          <a:p>
-            <a:pPr marL="0" indent="0" algn="ctr">
-              <a:buNone/>
-            </a:pPr>
-            <a:r>
-              <a:rPr lang="en-US" sz="1000" dirty="0">
-                <a:solidFill>
-                  <a:srgbClr val="FFFFFF"/>
-                </a:solidFill>
-                <a:latin typeface="Calibri" pitchFamily="34" charset="0"/>
-                <a:ea typeface="Calibri" pitchFamily="34" charset="-122"/>
-                <a:cs typeface="Calibri" pitchFamily="34" charset="-120"/>
-              </a:rPr>
-              <a:t>Customers</a:t>
-            </a:r>
-            <a:endParaRPr lang="en-US" sz="1000" dirty="0"/>
-          </a:p>
-        </p:txBody>
-      </p:sp>
-      <p:sp>
-        <p:nvSpPr>
-          <p:cNvPr id="16" name="Shape 14"/>
-          <p:cNvSpPr/>
-          <p:nvPr/>
-        </p:nvSpPr>
-        <p:spPr>
-          <a:xfrm>
-            <a:off x="457200" y="2240280"/>
-            <a:ext cx="4206240" cy="1828800"/>
-          </a:xfrm>
-          <a:prstGeom prst="rect">
-            <a:avLst/>
-          </a:prstGeom>
-          <a:solidFill>
-            <a:srgbClr val="E8F4F8"/>
-          </a:solidFill>
-          <a:ln w="6350">
-            <a:solidFill>
-              <a:srgbClr val="64748B"/>
-            </a:solidFill>
-            <a:prstDash val="solid"/>
-          </a:ln>
-        </p:spPr>
-        <p:txBody>
-          <a:bodyPr/>
-          <a:lstStyle/>
-          <a:p>
-            <a:endParaRPr lang="en-US"/>
-          </a:p>
-        </p:txBody>
-      </p:sp>
-      <p:sp>
-        <p:nvSpPr>
-          <p:cNvPr id="17" name="Text 15"/>
-          <p:cNvSpPr/>
-          <p:nvPr/>
-        </p:nvSpPr>
-        <p:spPr>
-          <a:xfrm>
-            <a:off x="548640" y="2926080"/>
-            <a:ext cx="4023360" cy="365760"/>
-          </a:xfrm>
-          <a:prstGeom prst="rect">
-            <a:avLst/>
-          </a:prstGeom>
-          <a:noFill/>
-          <a:ln/>
-        </p:spPr>
-        <p:txBody>
-          <a:bodyPr wrap="square" rtlCol="0" anchor="ctr"/>
-          <a:lstStyle/>
-          <a:p>
-            <a:pPr marL="0" indent="0" algn="ctr">
-              <a:buNone/>
-            </a:pPr>
-            <a:r>
-              <a:rPr lang="en-US" sz="1200" dirty="0">
-                <a:solidFill>
-                  <a:srgbClr val="64748B"/>
-                </a:solidFill>
-                <a:latin typeface="Calibri" pitchFamily="34" charset="0"/>
-                <a:ea typeface="Calibri" pitchFamily="34" charset="-122"/>
-                <a:cs typeface="Calibri" pitchFamily="34" charset="-120"/>
-              </a:rPr>
-              <a:t>Sales by Category [Bar Chart]</a:t>
-            </a:r>
-            <a:endParaRPr lang="en-US" sz="1200" dirty="0"/>
-          </a:p>
-        </p:txBody>
-      </p:sp>
-      <p:sp>
-        <p:nvSpPr>
-          <p:cNvPr id="18" name="Shape 16"/>
-          <p:cNvSpPr/>
-          <p:nvPr/>
-        </p:nvSpPr>
-        <p:spPr>
-          <a:xfrm>
-            <a:off x="4846320" y="2240280"/>
-            <a:ext cx="3840480" cy="1828800"/>
-          </a:xfrm>
-          <a:prstGeom prst="rect">
-            <a:avLst/>
-          </a:prstGeom>
-          <a:solidFill>
-            <a:srgbClr val="E8F4F8"/>
-          </a:solidFill>
-          <a:ln w="6350">
-            <a:solidFill>
-              <a:srgbClr val="64748B"/>
-            </a:solidFill>
-            <a:prstDash val="solid"/>
-          </a:ln>
-        </p:spPr>
-        <p:txBody>
-          <a:bodyPr/>
-          <a:lstStyle/>
-          <a:p>
-            <a:endParaRPr lang="en-US"/>
-          </a:p>
-        </p:txBody>
-      </p:sp>
-      <p:sp>
-        <p:nvSpPr>
-          <p:cNvPr id="19" name="Text 17"/>
-          <p:cNvSpPr/>
-          <p:nvPr/>
-        </p:nvSpPr>
-        <p:spPr>
-          <a:xfrm>
-            <a:off x="4937760" y="2926080"/>
-            <a:ext cx="3657600" cy="365760"/>
-          </a:xfrm>
-          <a:prstGeom prst="rect">
-            <a:avLst/>
-          </a:prstGeom>
-          <a:noFill/>
-          <a:ln/>
-        </p:spPr>
-        <p:txBody>
-          <a:bodyPr wrap="square" rtlCol="0" anchor="ctr"/>
-          <a:lstStyle/>
-          <a:p>
-            <a:pPr marL="0" indent="0" algn="ctr">
-              <a:buNone/>
-            </a:pPr>
-            <a:r>
-              <a:rPr lang="en-US" sz="1200" dirty="0">
-                <a:solidFill>
-                  <a:srgbClr val="64748B"/>
-                </a:solidFill>
-                <a:latin typeface="Calibri" pitchFamily="34" charset="0"/>
-                <a:ea typeface="Calibri" pitchFamily="34" charset="-122"/>
-                <a:cs typeface="Calibri" pitchFamily="34" charset="-120"/>
-              </a:rPr>
-              <a:t>Sales Trend by Month [Line Chart]</a:t>
-            </a:r>
-            <a:endParaRPr lang="en-US" sz="1200" dirty="0"/>
-          </a:p>
-        </p:txBody>
-      </p:sp>
-      <p:sp>
-        <p:nvSpPr>
-          <p:cNvPr id="20" name="Shape 18"/>
-          <p:cNvSpPr/>
-          <p:nvPr/>
-        </p:nvSpPr>
-        <p:spPr>
-          <a:xfrm>
-            <a:off x="457200" y="4160520"/>
-            <a:ext cx="4206240" cy="548640"/>
-          </a:xfrm>
-          <a:prstGeom prst="rect">
-            <a:avLst/>
-          </a:prstGeom>
-          <a:solidFill>
-            <a:srgbClr val="E8F4F8"/>
-          </a:solidFill>
-          <a:ln/>
-        </p:spPr>
-        <p:txBody>
-          <a:bodyPr/>
-          <a:lstStyle/>
-          <a:p>
-            <a:endParaRPr lang="en-US"/>
-          </a:p>
-        </p:txBody>
-      </p:sp>
-      <p:sp>
-        <p:nvSpPr>
-          <p:cNvPr id="21" name="Text 19"/>
-          <p:cNvSpPr/>
-          <p:nvPr/>
-        </p:nvSpPr>
-        <p:spPr>
-          <a:xfrm>
-            <a:off x="548640" y="4251960"/>
-            <a:ext cx="4023360" cy="365760"/>
-          </a:xfrm>
-          <a:prstGeom prst="rect">
-            <a:avLst/>
-          </a:prstGeom>
-          <a:noFill/>
-          <a:ln/>
-        </p:spPr>
-        <p:txBody>
-          <a:bodyPr wrap="square" rtlCol="0" anchor="ctr"/>
-          <a:lstStyle/>
-          <a:p>
-            <a:pPr marL="0" indent="0" algn="ctr">
-              <a:buNone/>
-            </a:pPr>
-            <a:r>
-              <a:rPr lang="en-US" sz="1100" dirty="0">
-                <a:solidFill>
-                  <a:srgbClr val="2D3748"/>
-                </a:solidFill>
-                <a:latin typeface="Calibri" pitchFamily="34" charset="0"/>
-                <a:ea typeface="Calibri" pitchFamily="34" charset="-122"/>
-                <a:cs typeface="Calibri" pitchFamily="34" charset="-120"/>
-              </a:rPr>
-              <a:t>Sales by Province [Map]</a:t>
-            </a:r>
-            <a:endParaRPr lang="en-US" sz="1100" dirty="0"/>
-          </a:p>
-        </p:txBody>
-      </p:sp>
-      <p:sp>
-        <p:nvSpPr>
-          <p:cNvPr id="22" name="Shape 20"/>
-          <p:cNvSpPr/>
-          <p:nvPr/>
-        </p:nvSpPr>
-        <p:spPr>
-          <a:xfrm>
-            <a:off x="4846320" y="4160520"/>
-            <a:ext cx="3840480" cy="548640"/>
-          </a:xfrm>
-          <a:prstGeom prst="rect">
-            <a:avLst/>
-          </a:prstGeom>
-          <a:solidFill>
-            <a:srgbClr val="E8F4F8"/>
-          </a:solidFill>
-          <a:ln/>
-        </p:spPr>
-        <p:txBody>
-          <a:bodyPr/>
-          <a:lstStyle/>
-          <a:p>
-            <a:endParaRPr lang="en-US"/>
-          </a:p>
-        </p:txBody>
-      </p:sp>
-      <p:sp>
-        <p:nvSpPr>
-          <p:cNvPr id="23" name="Text 21"/>
-          <p:cNvSpPr/>
-          <p:nvPr/>
-        </p:nvSpPr>
-        <p:spPr>
-          <a:xfrm>
-            <a:off x="4937760" y="4251960"/>
-            <a:ext cx="3657600" cy="365760"/>
-          </a:xfrm>
-          <a:prstGeom prst="rect">
-            <a:avLst/>
-          </a:prstGeom>
-          <a:noFill/>
-          <a:ln/>
-        </p:spPr>
-        <p:txBody>
-          <a:bodyPr wrap="square" rtlCol="0" anchor="ctr"/>
-          <a:lstStyle/>
-          <a:p>
-            <a:pPr marL="0" indent="0" algn="ctr">
-              <a:buNone/>
-            </a:pPr>
-            <a:r>
-              <a:rPr lang="en-US" sz="1100" dirty="0">
-                <a:solidFill>
-                  <a:srgbClr val="2D3748"/>
-                </a:solidFill>
-                <a:latin typeface="Calibri" pitchFamily="34" charset="0"/>
-                <a:ea typeface="Calibri" pitchFamily="34" charset="-122"/>
-                <a:cs typeface="Calibri" pitchFamily="34" charset="-120"/>
-              </a:rPr>
-              <a:t>Top Products [Table]</a:t>
-            </a:r>
-            <a:endParaRPr lang="en-US" sz="1100" dirty="0"/>
-          </a:p>
-        </p:txBody>
-      </p:sp>
-    </p:spTree>
-  </p:cSld>
-  <p:clrMapOvr>
-    <a:masterClrMapping/>
-  </p:clrMapOvr>
-</p:sld>
-</file>
-
-<file path=ppt/slides/slide23.xml><?xml version="1.0" encoding="utf-8"?>
-<p:sld xmlns:a="http://schemas.openxmlformats.org/drawingml/2006/main" xmlns:r="http://schemas.openxmlformats.org/officeDocument/2006/relationships" xmlns:p="http://schemas.openxmlformats.org/presentationml/2006/main">
-  <p:cSld name="Slide 24">
-    <p:bg>
-      <p:bgPr>
-        <a:solidFill>
-          <a:srgbClr val="0B3954"/>
-        </a:solidFill>
-        <a:effectLst/>
-      </p:bgPr>
-    </p:bg>
-    <p:spTree>
-      <p:nvGrpSpPr>
-        <p:cNvPr id="1" name=""/>
-        <p:cNvGrpSpPr/>
-        <p:nvPr/>
-      </p:nvGrpSpPr>
-      <p:grpSpPr>
-        <a:xfrm>
-          <a:off x="0" y="0"/>
-          <a:ext cx="0" cy="0"/>
-          <a:chOff x="0" y="0"/>
-          <a:chExt cx="0" cy="0"/>
-        </a:xfrm>
-      </p:grpSpPr>
-      <p:sp>
-        <p:nvSpPr>
-          <p:cNvPr id="2" name="Text 0"/>
-          <p:cNvSpPr/>
-          <p:nvPr/>
-        </p:nvSpPr>
-        <p:spPr>
-          <a:xfrm>
-            <a:off x="457200" y="1828800"/>
-            <a:ext cx="8229600" cy="822960"/>
-          </a:xfrm>
-          <a:prstGeom prst="rect">
-            <a:avLst/>
-          </a:prstGeom>
-          <a:noFill/>
-          <a:ln/>
-        </p:spPr>
-        <p:txBody>
-          <a:bodyPr wrap="square" rtlCol="0" anchor="ctr"/>
-          <a:lstStyle/>
-          <a:p>
-            <a:pPr marL="0" indent="0" algn="ctr">
-              <a:buNone/>
-            </a:pPr>
-            <a:r>
-              <a:rPr lang="en-US" sz="4800" b="1" dirty="0">
-                <a:solidFill>
-                  <a:srgbClr val="FFFFFF"/>
-                </a:solidFill>
-                <a:latin typeface="Calibri" pitchFamily="34" charset="0"/>
-                <a:ea typeface="Calibri" pitchFamily="34" charset="-122"/>
-                <a:cs typeface="Calibri" pitchFamily="34" charset="-120"/>
-              </a:rPr>
-              <a:t>Questions?</a:t>
-            </a:r>
-            <a:endParaRPr lang="en-US" sz="4800" dirty="0"/>
-          </a:p>
-        </p:txBody>
-      </p:sp>
-      <p:sp>
-        <p:nvSpPr>
-          <p:cNvPr id="3" name="Text 1"/>
-          <p:cNvSpPr/>
-          <p:nvPr/>
-        </p:nvSpPr>
-        <p:spPr>
-          <a:xfrm>
-            <a:off x="457200" y="2743200"/>
-            <a:ext cx="8229600" cy="457200"/>
-          </a:xfrm>
-          <a:prstGeom prst="rect">
-            <a:avLst/>
-          </a:prstGeom>
-          <a:noFill/>
-          <a:ln/>
-        </p:spPr>
-        <p:txBody>
-          <a:bodyPr wrap="square" rtlCol="0" anchor="ctr"/>
-          <a:lstStyle/>
-          <a:p>
-            <a:pPr marL="0" indent="0" algn="ctr">
-              <a:buNone/>
-            </a:pPr>
-            <a:r>
-              <a:rPr lang="en-US" sz="1600" dirty="0">
-                <a:solidFill>
-                  <a:srgbClr val="64748B"/>
-                </a:solidFill>
-                <a:latin typeface="Calibri" pitchFamily="34" charset="0"/>
-                <a:ea typeface="Calibri" pitchFamily="34" charset="-122"/>
-                <a:cs typeface="Calibri" pitchFamily="34" charset="-120"/>
-              </a:rPr>
-              <a:t>The cloud is not just about technology — it's about business agility!</a:t>
-            </a:r>
-            <a:endParaRPr lang="en-US" sz="1600" dirty="0"/>
-          </a:p>
-        </p:txBody>
-      </p:sp>
-      <p:sp>
-        <p:nvSpPr>
-          <p:cNvPr id="4" name="Text 2"/>
-          <p:cNvSpPr/>
-          <p:nvPr/>
-        </p:nvSpPr>
-        <p:spPr>
-          <a:xfrm>
-            <a:off x="457200" y="3840480"/>
-            <a:ext cx="8229600" cy="457200"/>
-          </a:xfrm>
-          <a:prstGeom prst="rect">
-            <a:avLst/>
-          </a:prstGeom>
-          <a:noFill/>
-          <a:ln/>
-        </p:spPr>
-        <p:txBody>
-          <a:bodyPr wrap="square" rtlCol="0" anchor="ctr"/>
-          <a:lstStyle/>
-          <a:p>
-            <a:pPr marL="0" indent="0" algn="ctr">
-              <a:buNone/>
-            </a:pPr>
-            <a:r>
-              <a:rPr lang="en-US" sz="1600" dirty="0">
-                <a:solidFill>
-                  <a:srgbClr val="0EA5E9"/>
-                </a:solidFill>
-                <a:latin typeface="Calibri" pitchFamily="34" charset="0"/>
-                <a:ea typeface="Calibri" pitchFamily="34" charset="-122"/>
-                <a:cs typeface="Calibri" pitchFamily="34" charset="-120"/>
-              </a:rPr>
-              <a:t>Next: Advanced Power BI &amp; DAX</a:t>
-            </a:r>
-            <a:endParaRPr lang="en-US" sz="1600" dirty="0"/>
           </a:p>
         </p:txBody>
       </p:sp>
